--- a/05. DOCUMENTACION/PRESENTACION TI.1.2. SOAP sin BDD en DOTNET GR4.pptx
+++ b/05. DOCUMENTACION/PRESENTACION TI.1.2. SOAP sin BDD en DOTNET GR4.pptx
@@ -8402,7 +8402,7 @@
           <a:p>
             <a:r>
               <a:rPr lang="es-EC"/>
-              <a:t>Servidor [SOAP | RESTful]</a:t>
+              <a:t>Servidor SOAP</a:t>
             </a:r>
           </a:p>
         </p:txBody>
@@ -8458,7 +8458,7 @@
           <a:p>
             <a:r>
               <a:rPr lang="es-MX"/>
-              <a:t>[Tecnología] · [URL base del servicio]</a:t>
+              <a:t>ASP.NET Core + SoapCore · http://localhost:5052</a:t>
             </a:r>
             <a:endParaRPr lang="es-EC"/>
           </a:p>
@@ -8549,7 +8549,7 @@
             </a:pPr>
             <a:r>
               <a:rPr lang="es-MX"/>
-              <a:t>Crear un proyecto [tipo de proyecto] en [IDE].</a:t>
+              <a:t>Crear un proyecto ASP.NET Core Web API en Visual Studio 2026.</a:t>
             </a:r>
           </a:p>
           <a:p>
@@ -8559,7 +8559,7 @@
             </a:pPr>
             <a:r>
               <a:rPr lang="es-MX"/>
-              <a:t>Nombrarlo WS_CON_UNI_[JAVA | DOTNET]_[SOAP | RESTful] con el paquete ec.edu.monster.</a:t>
+              <a:t>Nombrarlo WS_CON_UNI_DOTNET_SOAP (también es su espacio de nombres).</a:t>
             </a:r>
           </a:p>
           <a:p>
@@ -8569,7 +8569,7 @@
             </a:pPr>
             <a:r>
               <a:rPr lang="es-MX"/>
-              <a:t>Configurar [servidor de aplicaciones y puerto].</a:t>
+              <a:t>Configurar Kestrel en http://localhost:5052 (launchSettings.json).</a:t>
             </a:r>
           </a:p>
           <a:p>
@@ -8579,7 +8579,7 @@
             </a:pPr>
             <a:r>
               <a:rPr lang="es-MX"/>
-              <a:t>Agregar las dependencias: [librerías].</a:t>
+              <a:t>Agregar las dependencias: SoapCore 1.2.1.16.</a:t>
             </a:r>
             <a:endParaRPr lang="es-EC"/>
           </a:p>
@@ -8762,7 +8762,7 @@
           <a:p>
             <a:r>
               <a:rPr lang="es-MX"/>
-              <a:t>[Servicios web SOAP | Endpoints REST]: exponen las operaciones al exterior.</a:t>
+              <a:t>Servicios web SOAP (LoginWebService, CatalogWebService y ConverterWebService): exponen las operaciones al exterior.</a:t>
             </a:r>
             <a:endParaRPr lang="es-EC"/>
           </a:p>
@@ -9607,7 +9607,7 @@
                 </a:solidFill>
                 <a:latin typeface="Segoe UI" panose="020B0502040204020203" pitchFamily="34" charset="0"/>
               </a:rPr>
-              <a:t>Rutas en este proyecto:  [login → …]  ·  [catálogo → …]  ·  [conversión → …]</a:t>
+              <a:t>Rutas en este proyecto:  login → /LoginWebService.svc  ·  catálogo → /CatalogWebService.svc  ·  conversión → /ConverterWebService.svc</a:t>
             </a:r>
             <a:endParaRPr lang="es-EC" sz="1500">
               <a:solidFill>
@@ -10837,58 +10837,338 @@
           <a:p>
             <a:pPr>
               <a:lnSpc>
-                <a:spcPct val="110000"/>
+                <a:spcPct val="100000"/>
               </a:lnSpc>
+              <a:spcBef>
+                <a:spcPts val="0"/>
+              </a:spcBef>
+              <a:spcAft>
+                <a:spcPts val="0"/>
+              </a:spcAft>
             </a:pPr>
             <a:r>
-              <a:rPr lang="es-MX"/>
-              <a:t>[Pega aquí el fragmento principal:</a:t>
+              <a:rPr lang="en-US" noProof="1"/>
+              <a:t xml:space="preserve">[ServiceContract]</a:t>
             </a:r>
           </a:p>
           <a:p>
             <a:pPr>
               <a:lnSpc>
-                <a:spcPct val="110000"/>
+                <a:spcPct val="100000"/>
               </a:lnSpc>
+              <a:spcBef>
+                <a:spcPts val="0"/>
+              </a:spcBef>
+              <a:spcAft>
+                <a:spcPts val="0"/>
+              </a:spcAft>
             </a:pPr>
             <a:r>
+              <a:rPr lang="en-US" noProof="1"/>
+              <a:t xml:space="preserve">public interface IConverterWebService</a:t>
+            </a:r>
+          </a:p>
+          <a:p>
+            <a:pPr>
+              <a:lnSpc>
+                <a:spcPct val="100000"/>
+              </a:lnSpc>
+              <a:spcBef>
+                <a:spcPts val="0"/>
+              </a:spcBef>
+              <a:spcAft>
+                <a:spcPts val="0"/>
+              </a:spcAft>
+            </a:pPr>
+            <a:r>
+              <a:rPr lang="en-US" noProof="1"/>
+              <a:t xml:space="preserve">{</a:t>
+            </a:r>
+          </a:p>
+          <a:p>
+            <a:pPr>
+              <a:lnSpc>
+                <a:spcPct val="100000"/>
+              </a:lnSpc>
+              <a:spcBef>
+                <a:spcPts val="0"/>
+              </a:spcBef>
+              <a:spcAft>
+                <a:spcPts val="0"/>
+              </a:spcAft>
+            </a:pPr>
+            <a:r>
+              <a:rPr lang="en-US" noProof="1"/>
+              <a:t xml:space="preserve">  [OperationContract]</a:t>
+            </a:r>
+          </a:p>
+          <a:p>
+            <a:pPr>
+              <a:lnSpc>
+                <a:spcPct val="100000"/>
+              </a:lnSpc>
+              <a:spcBef>
+                <a:spcPts val="0"/>
+              </a:spcBef>
+              <a:spcAft>
+                <a:spcPts val="0"/>
+              </a:spcAft>
+            </a:pPr>
+            <a:r>
+              <a:rPr lang="en-US" noProof="1"/>
+              <a:t xml:space="preserve">  ConverterResponseDTO Convert(string token, string type,</a:t>
+            </a:r>
+          </a:p>
+          <a:p>
+            <a:pPr>
+              <a:lnSpc>
+                <a:spcPct val="100000"/>
+              </a:lnSpc>
+              <a:spcBef>
+                <a:spcPts val="0"/>
+              </a:spcBef>
+              <a:spcAft>
+                <a:spcPts val="0"/>
+              </a:spcAft>
+            </a:pPr>
+            <a:r>
+              <a:rPr lang="en-US" noProof="1"/>
+              <a:t xml:space="preserve">    double value, string from, string to);</a:t>
+            </a:r>
+          </a:p>
+          <a:p>
+            <a:pPr>
+              <a:lnSpc>
+                <a:spcPct val="100000"/>
+              </a:lnSpc>
+              <a:spcBef>
+                <a:spcPts val="0"/>
+              </a:spcBef>
+              <a:spcAft>
+                <a:spcPts val="0"/>
+              </a:spcAft>
+            </a:pPr>
+            <a:r>
+              <a:rPr lang="en-US" noProof="1"/>
+              <a:t xml:space="preserve">}</a:t>
+            </a:r>
+          </a:p>
+          <a:p>
+            <a:pPr>
+              <a:lnSpc>
+                <a:spcPct val="100000"/>
+              </a:lnSpc>
+              <a:spcBef>
+                <a:spcPts val="0"/>
+              </a:spcBef>
+              <a:spcAft>
+                <a:spcPts val="0"/>
+              </a:spcAft>
+            </a:pPr>
+            <a:endParaRPr lang="en-US" noProof="1"/>
+          </a:p>
+          <a:p>
+            <a:pPr>
+              <a:lnSpc>
+                <a:spcPct val="100000"/>
+              </a:lnSpc>
+              <a:spcBef>
+                <a:spcPts val="0"/>
+              </a:spcBef>
+              <a:spcAft>
+                <a:spcPts val="0"/>
+              </a:spcAft>
+            </a:pPr>
+            <a:r>
+              <a:rPr lang="en-US" noProof="1"/>
+              <a:t xml:space="preserve">// Program.cs</a:t>
+            </a:r>
+          </a:p>
+          <a:p>
+            <a:pPr>
+              <a:lnSpc>
+                <a:spcPct val="100000"/>
+              </a:lnSpc>
+              <a:spcBef>
+                <a:spcPts val="0"/>
+              </a:spcBef>
+              <a:spcAft>
+                <a:spcPts val="0"/>
+              </a:spcAft>
+            </a:pPr>
+            <a:r>
+              <a:rPr lang="en-US" noProof="1"/>
+              <a:t xml:space="preserve">builder.Services.AddSoapCore();</a:t>
+            </a:r>
+          </a:p>
+          <a:p>
+            <a:pPr>
+              <a:lnSpc>
+                <a:spcPct val="100000"/>
+              </a:lnSpc>
+              <a:spcBef>
+                <a:spcPts val="0"/>
+              </a:spcBef>
+              <a:spcAft>
+                <a:spcPts val="0"/>
+              </a:spcAft>
+            </a:pPr>
+            <a:r>
+              <a:rPr lang="en-US" noProof="1"/>
+              <a:t xml:space="preserve">builder.Services.AddSingleton&lt;IConverterWebService,</a:t>
+            </a:r>
+          </a:p>
+          <a:p>
+            <a:pPr>
+              <a:lnSpc>
+                <a:spcPct val="100000"/>
+              </a:lnSpc>
+              <a:spcBef>
+                <a:spcPts val="0"/>
+              </a:spcBef>
+              <a:spcAft>
+                <a:spcPts val="0"/>
+              </a:spcAft>
+            </a:pPr>
+            <a:r>
+              <a:rPr lang="en-US" noProof="1"/>
+              <a:t xml:space="preserve">  ConverterWebService&gt;();</a:t>
+            </a:r>
+          </a:p>
+          <a:p>
+            <a:pPr>
+              <a:lnSpc>
+                <a:spcPct val="100000"/>
+              </a:lnSpc>
+              <a:spcBef>
+                <a:spcPts val="0"/>
+              </a:spcBef>
+              <a:spcAft>
+                <a:spcPts val="0"/>
+              </a:spcAft>
+            </a:pPr>
+            <a:r>
+              <a:rPr lang="en-US" noProof="1"/>
+              <a:t xml:space="preserve">app.UseEndpoints(endpoints =&gt;</a:t>
+            </a:r>
+          </a:p>
+          <a:p>
+            <a:pPr>
+              <a:lnSpc>
+                <a:spcPct val="100000"/>
+              </a:lnSpc>
+              <a:spcBef>
+                <a:spcPts val="0"/>
+              </a:spcBef>
+              <a:spcAft>
+                <a:spcPts val="0"/>
+              </a:spcAft>
+            </a:pPr>
+            <a:r>
+              <a:rPr lang="en-US" noProof="1"/>
+              <a:t xml:space="preserve">{</a:t>
+            </a:r>
+          </a:p>
+          <a:p>
+            <a:pPr>
+              <a:lnSpc>
+                <a:spcPct val="100000"/>
+              </a:lnSpc>
+              <a:spcBef>
+                <a:spcPts val="0"/>
+              </a:spcBef>
+              <a:spcAft>
+                <a:spcPts val="0"/>
+              </a:spcAft>
+            </a:pPr>
+            <a:r>
+              <a:rPr lang="en-US" noProof="1"/>
+              <a:t xml:space="preserve">  _ = endpoints.UseSoapEndpoint&lt;IConverterWebService&gt;(</a:t>
+            </a:r>
+          </a:p>
+          <a:p>
+            <a:pPr>
+              <a:lnSpc>
+                <a:spcPct val="100000"/>
+              </a:lnSpc>
+              <a:spcBef>
+                <a:spcPts val="0"/>
+              </a:spcBef>
+              <a:spcAft>
+                <a:spcPts val="0"/>
+              </a:spcAft>
+            </a:pPr>
+            <a:r>
+              <a:rPr lang="en-US" noProof="1"/>
+              <a:t xml:space="preserve">    "/ConverterWebService.svc",</a:t>
+            </a:r>
+          </a:p>
+          <a:p>
+            <a:pPr>
+              <a:lnSpc>
+                <a:spcPct val="100000"/>
+              </a:lnSpc>
+              <a:spcBef>
+                <a:spcPts val="0"/>
+              </a:spcBef>
+              <a:spcAft>
+                <a:spcPts val="0"/>
+              </a:spcAft>
+            </a:pPr>
+            <a:r>
+              <a:rPr lang="en-US" noProof="1"/>
+              <a:t xml:space="preserve">    new SoapEncoderOptions(), SoapSerializer.XmlSerializer);</a:t>
+            </a:r>
+          </a:p>
+          <a:p>
+            <a:pPr>
+              <a:lnSpc>
+                <a:spcPct val="100000"/>
+              </a:lnSpc>
+              <a:spcBef>
+                <a:spcPts val="0"/>
+              </a:spcBef>
+              <a:spcAft>
+                <a:spcPts val="0"/>
+              </a:spcAft>
+            </a:pPr>
+            <a:r>
+              <a:rPr lang="en-US" noProof="1"/>
+              <a:t xml:space="preserve">});</a:t>
+            </a:r>
+          </a:p>
+        </p:txBody>
+      </p:sp>
+      <p:sp>
+        <p:nvSpPr>
+          <p:cNvPr id="4" name="Text Placeholder 3">
+            <a:extLst>
+              <a:ext uri="{FF2B5EF4-FFF2-40B4-BE49-F238E27FC236}">
+                <a16:creationId xmlns:a16="http://schemas.microsoft.com/office/drawing/2014/main" id="{0B26EB7F-8CAF-5D1F-5E05-124982840E83}"/>
+              </a:ext>
+            </a:extLst>
+          </p:cNvPr>
+          <p:cNvSpPr>
+            <a:spLocks noGrp="1"/>
+          </p:cNvSpPr>
+          <p:nvPr>
+            <p:ph type="body" sz="quarter" idx="12"/>
+          </p:nvPr>
+        </p:nvSpPr>
+        <p:spPr/>
+        <p:txBody>
+          <a:bodyPr/>
+          <a:lstStyle/>
+          <a:p>
+            <a:r>
               <a:rPr lang="es-MX"/>
-              <a:t> definición del servicio o endpoint]</a:t>
-            </a:r>
-            <a:endParaRPr lang="es-EC"/>
-          </a:p>
-        </p:txBody>
-      </p:sp>
-      <p:sp>
-        <p:nvSpPr>
-          <p:cNvPr id="4" name="Text Placeholder 3">
-            <a:extLst>
-              <a:ext uri="{FF2B5EF4-FFF2-40B4-BE49-F238E27FC236}">
-                <a16:creationId xmlns:a16="http://schemas.microsoft.com/office/drawing/2014/main" id="{0B26EB7F-8CAF-5D1F-5E05-124982840E83}"/>
-              </a:ext>
-            </a:extLst>
-          </p:cNvPr>
-          <p:cNvSpPr>
-            <a:spLocks noGrp="1"/>
-          </p:cNvSpPr>
-          <p:nvPr>
-            <p:ph type="body" sz="quarter" idx="12"/>
-          </p:nvPr>
-        </p:nvSpPr>
-        <p:spPr/>
-        <p:txBody>
-          <a:bodyPr/>
-          <a:lstStyle/>
+              <a:t>[ServiceContract] y [OperationContract] definen el contrato; SoapCore lo publica como endpoint .svc con su WSDL.</a:t>
+            </a:r>
+          </a:p>
           <a:p>
             <a:r>
               <a:rPr lang="es-MX"/>
-              <a:t>[Qué hace este fragmento.]</a:t>
-            </a:r>
-          </a:p>
-          <a:p>
-            <a:r>
-              <a:rPr lang="es-MX"/>
-              <a:t>[Por qué es importante en el proyecto.]</a:t>
+              <a:t>El servidor registra tres servicios (Login, Catalog y Converter) y cada uno valida el token antes de responder.</a:t>
             </a:r>
             <a:endParaRPr lang="es-EC"/>
           </a:p>
@@ -11035,13 +11315,13 @@
           <a:p>
             <a:r>
               <a:rPr lang="es-MX"/>
-              <a:t>Ejecutar el servidor desde [IDE o comando].</a:t>
+              <a:t>Ejecutar el servidor desde Visual Studio 2026 o con dotnet run.</a:t>
             </a:r>
           </a:p>
           <a:p>
             <a:r>
               <a:rPr lang="es-MX"/>
-              <a:t>Comprobar [el WSDL en … | el endpoint en …].</a:t>
+              <a:t>Comprobar el WSDL en http://localhost:5052/LoginWebService.svc?wsdl.</a:t>
             </a:r>
           </a:p>
           <a:p>
@@ -11240,7 +11520,7 @@
           <a:p>
             <a:r>
               <a:rPr lang="es-EC"/>
-              <a:t>[Tecnología] · patrón MVC</a:t>
+              <a:t>.NET 10 + cliente WCF · patrón MVC</a:t>
             </a:r>
           </a:p>
         </p:txBody>
@@ -11327,7 +11607,7 @@
           <a:p>
             <a:r>
               <a:rPr lang="es-MX"/>
-              <a:t>Proyecto CONSOLE_CON_UNI_[JAVA | DOTNET]_[SOAP | RESTful] creado en [IDE].</a:t>
+              <a:t>Proyecto CONSOLE_CON_UNI_DOTNET_SOAP creado en Visual Studio 2026.</a:t>
             </a:r>
           </a:p>
           <a:p>
@@ -11510,58 +11790,301 @@
           <a:p>
             <a:pPr>
               <a:lnSpc>
-                <a:spcPct val="110000"/>
+                <a:spcPct val="100000"/>
               </a:lnSpc>
+              <a:spcBef>
+                <a:spcPts val="0"/>
+              </a:spcBef>
+              <a:spcAft>
+                <a:spcPts val="0"/>
+              </a:spcAft>
             </a:pPr>
             <a:r>
-              <a:rPr lang="es-MX"/>
-              <a:t>[Pega aquí cómo el cliente</a:t>
+              <a:rPr lang="en-US" noProof="1"/>
+              <a:t xml:space="preserve">internal class LoginHTTP</a:t>
             </a:r>
           </a:p>
           <a:p>
             <a:pPr>
               <a:lnSpc>
-                <a:spcPct val="110000"/>
+                <a:spcPct val="100000"/>
               </a:lnSpc>
+              <a:spcBef>
+                <a:spcPts val="0"/>
+              </a:spcBef>
+              <a:spcAft>
+                <a:spcPts val="0"/>
+              </a:spcAft>
             </a:pPr>
             <a:r>
+              <a:rPr lang="en-US" noProof="1"/>
+              <a:t xml:space="preserve">{</a:t>
+            </a:r>
+          </a:p>
+          <a:p>
+            <a:pPr>
+              <a:lnSpc>
+                <a:spcPct val="100000"/>
+              </a:lnSpc>
+              <a:spcBef>
+                <a:spcPts val="0"/>
+              </a:spcBef>
+              <a:spcAft>
+                <a:spcPts val="0"/>
+              </a:spcAft>
+            </a:pPr>
+            <a:r>
+              <a:rPr lang="en-US" noProof="1"/>
+              <a:t xml:space="preserve">  private readonly LoginWebServiceClient _client;</a:t>
+            </a:r>
+          </a:p>
+          <a:p>
+            <a:pPr>
+              <a:lnSpc>
+                <a:spcPct val="100000"/>
+              </a:lnSpc>
+              <a:spcBef>
+                <a:spcPts val="0"/>
+              </a:spcBef>
+              <a:spcAft>
+                <a:spcPts val="0"/>
+              </a:spcAft>
+            </a:pPr>
+            <a:endParaRPr lang="en-US" noProof="1"/>
+          </a:p>
+          <a:p>
+            <a:pPr>
+              <a:lnSpc>
+                <a:spcPct val="100000"/>
+              </a:lnSpc>
+              <a:spcBef>
+                <a:spcPts val="0"/>
+              </a:spcBef>
+              <a:spcAft>
+                <a:spcPts val="0"/>
+              </a:spcAft>
+            </a:pPr>
+            <a:r>
+              <a:rPr lang="en-US" noProof="1"/>
+              <a:t xml:space="preserve">  public LoginHTTP()</a:t>
+            </a:r>
+          </a:p>
+          <a:p>
+            <a:pPr>
+              <a:lnSpc>
+                <a:spcPct val="100000"/>
+              </a:lnSpc>
+              <a:spcBef>
+                <a:spcPts val="0"/>
+              </a:spcBef>
+              <a:spcAft>
+                <a:spcPts val="0"/>
+              </a:spcAft>
+            </a:pPr>
+            <a:r>
+              <a:rPr lang="en-US" noProof="1"/>
+              <a:t xml:space="preserve">  {</a:t>
+            </a:r>
+          </a:p>
+          <a:p>
+            <a:pPr>
+              <a:lnSpc>
+                <a:spcPct val="100000"/>
+              </a:lnSpc>
+              <a:spcBef>
+                <a:spcPts val="0"/>
+              </a:spcBef>
+              <a:spcAft>
+                <a:spcPts val="0"/>
+              </a:spcAft>
+            </a:pPr>
+            <a:r>
+              <a:rPr lang="en-US" noProof="1"/>
+              <a:t xml:space="preserve">    _client = new LoginWebServiceClient();</a:t>
+            </a:r>
+          </a:p>
+          <a:p>
+            <a:pPr>
+              <a:lnSpc>
+                <a:spcPct val="100000"/>
+              </a:lnSpc>
+              <a:spcBef>
+                <a:spcPts val="0"/>
+              </a:spcBef>
+              <a:spcAft>
+                <a:spcPts val="0"/>
+              </a:spcAft>
+            </a:pPr>
+            <a:r>
+              <a:rPr lang="en-US" noProof="1"/>
+              <a:t xml:space="preserve">  }</a:t>
+            </a:r>
+          </a:p>
+          <a:p>
+            <a:pPr>
+              <a:lnSpc>
+                <a:spcPct val="100000"/>
+              </a:lnSpc>
+              <a:spcBef>
+                <a:spcPts val="0"/>
+              </a:spcBef>
+              <a:spcAft>
+                <a:spcPts val="0"/>
+              </a:spcAft>
+            </a:pPr>
+            <a:endParaRPr lang="en-US" noProof="1"/>
+          </a:p>
+          <a:p>
+            <a:pPr>
+              <a:lnSpc>
+                <a:spcPct val="100000"/>
+              </a:lnSpc>
+              <a:spcBef>
+                <a:spcPts val="0"/>
+              </a:spcBef>
+              <a:spcAft>
+                <a:spcPts val="0"/>
+              </a:spcAft>
+            </a:pPr>
+            <a:r>
+              <a:rPr lang="en-US" noProof="1"/>
+              <a:t xml:space="preserve">  public async Task&lt;LoginResponseDTO?&gt; LoginAsync(</a:t>
+            </a:r>
+          </a:p>
+          <a:p>
+            <a:pPr>
+              <a:lnSpc>
+                <a:spcPct val="100000"/>
+              </a:lnSpc>
+              <a:spcBef>
+                <a:spcPts val="0"/>
+              </a:spcBef>
+              <a:spcAft>
+                <a:spcPts val="0"/>
+              </a:spcAft>
+            </a:pPr>
+            <a:r>
+              <a:rPr lang="en-US" noProof="1"/>
+              <a:t xml:space="preserve">    string username, string password)</a:t>
+            </a:r>
+          </a:p>
+          <a:p>
+            <a:pPr>
+              <a:lnSpc>
+                <a:spcPct val="100000"/>
+              </a:lnSpc>
+              <a:spcBef>
+                <a:spcPts val="0"/>
+              </a:spcBef>
+              <a:spcAft>
+                <a:spcPts val="0"/>
+              </a:spcAft>
+            </a:pPr>
+            <a:r>
+              <a:rPr lang="en-US" noProof="1"/>
+              <a:t xml:space="preserve">  {</a:t>
+            </a:r>
+          </a:p>
+          <a:p>
+            <a:pPr>
+              <a:lnSpc>
+                <a:spcPct val="100000"/>
+              </a:lnSpc>
+              <a:spcBef>
+                <a:spcPts val="0"/>
+              </a:spcBef>
+              <a:spcAft>
+                <a:spcPts val="0"/>
+              </a:spcAft>
+            </a:pPr>
+            <a:r>
+              <a:rPr lang="en-US" noProof="1"/>
+              <a:t xml:space="preserve">    var response = await _client.LoginAsync(username, password);</a:t>
+            </a:r>
+          </a:p>
+          <a:p>
+            <a:pPr>
+              <a:lnSpc>
+                <a:spcPct val="100000"/>
+              </a:lnSpc>
+              <a:spcBef>
+                <a:spcPts val="0"/>
+              </a:spcBef>
+              <a:spcAft>
+                <a:spcPts val="0"/>
+              </a:spcAft>
+            </a:pPr>
+            <a:r>
+              <a:rPr lang="en-US" noProof="1"/>
+              <a:t xml:space="preserve">    return response.Body.LoginResult;</a:t>
+            </a:r>
+          </a:p>
+          <a:p>
+            <a:pPr>
+              <a:lnSpc>
+                <a:spcPct val="100000"/>
+              </a:lnSpc>
+              <a:spcBef>
+                <a:spcPts val="0"/>
+              </a:spcBef>
+              <a:spcAft>
+                <a:spcPts val="0"/>
+              </a:spcAft>
+            </a:pPr>
+            <a:r>
+              <a:rPr lang="en-US" noProof="1"/>
+              <a:t xml:space="preserve">  }</a:t>
+            </a:r>
+          </a:p>
+          <a:p>
+            <a:pPr>
+              <a:lnSpc>
+                <a:spcPct val="100000"/>
+              </a:lnSpc>
+              <a:spcBef>
+                <a:spcPts val="0"/>
+              </a:spcBef>
+              <a:spcAft>
+                <a:spcPts val="0"/>
+              </a:spcAft>
+            </a:pPr>
+            <a:r>
+              <a:rPr lang="en-US" noProof="1"/>
+              <a:t xml:space="preserve">}</a:t>
+            </a:r>
+          </a:p>
+        </p:txBody>
+      </p:sp>
+      <p:sp>
+        <p:nvSpPr>
+          <p:cNvPr id="4" name="Text Placeholder 3">
+            <a:extLst>
+              <a:ext uri="{FF2B5EF4-FFF2-40B4-BE49-F238E27FC236}">
+                <a16:creationId xmlns:a16="http://schemas.microsoft.com/office/drawing/2014/main" id="{532B24EF-7A3C-74C9-6C54-DEF8F61E4574}"/>
+              </a:ext>
+            </a:extLst>
+          </p:cNvPr>
+          <p:cNvSpPr>
+            <a:spLocks noGrp="1"/>
+          </p:cNvSpPr>
+          <p:nvPr>
+            <p:ph type="body" sz="quarter" idx="12"/>
+          </p:nvPr>
+        </p:nvSpPr>
+        <p:spPr/>
+        <p:txBody>
+          <a:bodyPr/>
+          <a:lstStyle/>
+          <a:p>
+            <a:r>
               <a:rPr lang="es-MX"/>
-              <a:t> llama al servidor]</a:t>
-            </a:r>
-            <a:endParaRPr lang="es-EC"/>
-          </a:p>
-        </p:txBody>
-      </p:sp>
-      <p:sp>
-        <p:nvSpPr>
-          <p:cNvPr id="4" name="Text Placeholder 3">
-            <a:extLst>
-              <a:ext uri="{FF2B5EF4-FFF2-40B4-BE49-F238E27FC236}">
-                <a16:creationId xmlns:a16="http://schemas.microsoft.com/office/drawing/2014/main" id="{532B24EF-7A3C-74C9-6C54-DEF8F61E4574}"/>
-              </a:ext>
-            </a:extLst>
-          </p:cNvPr>
-          <p:cNvSpPr>
-            <a:spLocks noGrp="1"/>
-          </p:cNvSpPr>
-          <p:nvPr>
-            <p:ph type="body" sz="quarter" idx="12"/>
-          </p:nvPr>
-        </p:nvSpPr>
-        <p:spPr/>
-        <p:txBody>
-          <a:bodyPr/>
-          <a:lstStyle/>
+              <a:t>LoginWebServiceClient es el cliente WCF generado desde el WSDL del servidor.</a:t>
+            </a:r>
+          </a:p>
           <a:p>
             <a:r>
               <a:rPr lang="es-MX"/>
-              <a:t>[Qué hace este fragmento.]</a:t>
-            </a:r>
-          </a:p>
-          <a:p>
-            <a:r>
-              <a:rPr lang="es-MX"/>
-              <a:t>[Cómo maneja errores o la sesión.]</a:t>
+              <a:t>La llamada es asíncrona (async/await) y devuelve el DTO con estado, mensaje y token.</a:t>
             </a:r>
             <a:endParaRPr lang="es-EC"/>
           </a:p>
@@ -11680,7 +12203,7 @@
           <a:p>
             <a:r>
               <a:rPr lang="es-MX"/>
-              <a:t>Conversión de Unidades [SOAP | RESTful] sin BDD en [JAVA | .NET]</a:t>
+              <a:t>Conversión de Unidades SOAP sin BDD en .NET</a:t>
             </a:r>
             <a:endParaRPr lang="es-EC"/>
           </a:p>
@@ -11709,7 +12232,7 @@
           <a:p>
             <a:r>
               <a:rPr lang="pt-BR"/>
-              <a:t>[TI.1.X] · Arquitectura de Software</a:t>
+              <a:t>TI.1.2 · Arquitectura de Software</a:t>
             </a:r>
             <a:endParaRPr lang="es-EC"/>
           </a:p>
@@ -11751,7 +12274,7 @@
             </a:r>
             <a:r>
               <a:rPr lang="es-MX"/>
-              <a:t>  [Nombre Apellido] · [Nombre Apellido] · [Nombre Apellido]</a:t>
+              <a:t xml:space="preserve">  Diego Mateo Sosa Flores · Marcos David Escobar Vela · Carlos Isaac Ñato Caiza</a:t>
             </a:r>
           </a:p>
           <a:p>
@@ -11770,7 +12293,7 @@
             </a:r>
             <a:r>
               <a:rPr lang="es-MX"/>
-              <a:t>  [Ing. Nombre del tutor]</a:t>
+              <a:t xml:space="preserve">  Ing. Eduardo Mauricio Campaña Ortega</a:t>
             </a:r>
           </a:p>
           <a:p>
@@ -12152,7 +12675,7 @@
           <a:p>
             <a:r>
               <a:rPr lang="es-EC"/>
-              <a:t>[Tecnología] · patrón MVC</a:t>
+              <a:t>WinForms + WCF · patrón MVC</a:t>
             </a:r>
           </a:p>
         </p:txBody>
@@ -12239,7 +12762,7 @@
           <a:p>
             <a:r>
               <a:rPr lang="es-MX"/>
-              <a:t>Proyecto ESC_CON_UNI_[JAVA | DOTNET]_[SOAP | RESTful] creado en [IDE].</a:t>
+              <a:t>Proyecto ESC_CON_UNI_DOTNET_SOAP creado en Visual Studio 2026.</a:t>
             </a:r>
           </a:p>
           <a:p>
@@ -12422,58 +12945,290 @@
           <a:p>
             <a:pPr>
               <a:lnSpc>
-                <a:spcPct val="110000"/>
+                <a:spcPct val="100000"/>
               </a:lnSpc>
+              <a:spcBef>
+                <a:spcPts val="0"/>
+              </a:spcBef>
+              <a:spcAft>
+                <a:spcPts val="0"/>
+              </a:spcAft>
             </a:pPr>
             <a:r>
-              <a:rPr lang="es-MX"/>
-              <a:t>[Pega aquí cómo el cliente</a:t>
+              <a:rPr lang="en-US" noProof="1"/>
+              <a:t xml:space="preserve">var binding = new BasicHttpBinding</a:t>
             </a:r>
           </a:p>
           <a:p>
             <a:pPr>
               <a:lnSpc>
-                <a:spcPct val="110000"/>
+                <a:spcPct val="100000"/>
               </a:lnSpc>
+              <a:spcBef>
+                <a:spcPts val="0"/>
+              </a:spcBef>
+              <a:spcAft>
+                <a:spcPts val="0"/>
+              </a:spcAft>
             </a:pPr>
             <a:r>
+              <a:rPr lang="en-US" noProof="1"/>
+              <a:t xml:space="preserve">{</a:t>
+            </a:r>
+          </a:p>
+          <a:p>
+            <a:pPr>
+              <a:lnSpc>
+                <a:spcPct val="100000"/>
+              </a:lnSpc>
+              <a:spcBef>
+                <a:spcPts val="0"/>
+              </a:spcBef>
+              <a:spcAft>
+                <a:spcPts val="0"/>
+              </a:spcAft>
+            </a:pPr>
+            <a:r>
+              <a:rPr lang="en-US" noProof="1"/>
+              <a:t xml:space="preserve">  OpenTimeout = TiempoConexion,</a:t>
+            </a:r>
+          </a:p>
+          <a:p>
+            <a:pPr>
+              <a:lnSpc>
+                <a:spcPct val="100000"/>
+              </a:lnSpc>
+              <a:spcBef>
+                <a:spcPts val="0"/>
+              </a:spcBef>
+              <a:spcAft>
+                <a:spcPts val="0"/>
+              </a:spcAft>
+            </a:pPr>
+            <a:r>
+              <a:rPr lang="en-US" noProof="1"/>
+              <a:t xml:space="preserve">  SendTimeout = TiempoPeticion,</a:t>
+            </a:r>
+          </a:p>
+          <a:p>
+            <a:pPr>
+              <a:lnSpc>
+                <a:spcPct val="100000"/>
+              </a:lnSpc>
+              <a:spcBef>
+                <a:spcPts val="0"/>
+              </a:spcBef>
+              <a:spcAft>
+                <a:spcPts val="0"/>
+              </a:spcAft>
+            </a:pPr>
+            <a:r>
+              <a:rPr lang="en-US" noProof="1"/>
+              <a:t xml:space="preserve">  ReceiveTimeout = TiempoPeticion,</a:t>
+            </a:r>
+          </a:p>
+          <a:p>
+            <a:pPr>
+              <a:lnSpc>
+                <a:spcPct val="100000"/>
+              </a:lnSpc>
+              <a:spcBef>
+                <a:spcPts val="0"/>
+              </a:spcBef>
+              <a:spcAft>
+                <a:spcPts val="0"/>
+              </a:spcAft>
+            </a:pPr>
+            <a:r>
+              <a:rPr lang="en-US" noProof="1"/>
+              <a:t xml:space="preserve">  MaxReceivedMessageSize = int.MaxValue,</a:t>
+            </a:r>
+          </a:p>
+          <a:p>
+            <a:pPr>
+              <a:lnSpc>
+                <a:spcPct val="100000"/>
+              </a:lnSpc>
+              <a:spcBef>
+                <a:spcPts val="0"/>
+              </a:spcBef>
+              <a:spcAft>
+                <a:spcPts val="0"/>
+              </a:spcAft>
+            </a:pPr>
+            <a:r>
+              <a:rPr lang="en-US" noProof="1"/>
+              <a:t xml:space="preserve">};</a:t>
+            </a:r>
+          </a:p>
+          <a:p>
+            <a:pPr>
+              <a:lnSpc>
+                <a:spcPct val="100000"/>
+              </a:lnSpc>
+              <a:spcBef>
+                <a:spcPts val="0"/>
+              </a:spcBef>
+              <a:spcAft>
+                <a:spcPts val="0"/>
+              </a:spcAft>
+            </a:pPr>
+            <a:r>
+              <a:rPr lang="en-US" noProof="1"/>
+              <a:t xml:space="preserve">return new ConversorServicio(</a:t>
+            </a:r>
+          </a:p>
+          <a:p>
+            <a:pPr>
+              <a:lnSpc>
+                <a:spcPct val="100000"/>
+              </a:lnSpc>
+              <a:spcBef>
+                <a:spcPts val="0"/>
+              </a:spcBef>
+              <a:spcAft>
+                <a:spcPts val="0"/>
+              </a:spcAft>
+            </a:pPr>
+            <a:r>
+              <a:rPr lang="en-US" noProof="1"/>
+              <a:t xml:space="preserve">  new CanalLogin(new ChannelFactory&lt;ILoginWebService&gt;(binding,</a:t>
+            </a:r>
+          </a:p>
+          <a:p>
+            <a:pPr>
+              <a:lnSpc>
+                <a:spcPct val="100000"/>
+              </a:lnSpc>
+              <a:spcBef>
+                <a:spcPts val="0"/>
+              </a:spcBef>
+              <a:spcAft>
+                <a:spcPts val="0"/>
+              </a:spcAft>
+            </a:pPr>
+            <a:r>
+              <a:rPr lang="en-US" noProof="1"/>
+              <a:t xml:space="preserve">    new EndpointAddress(urlBase + "/LoginWebService.svc"))),</a:t>
+            </a:r>
+          </a:p>
+          <a:p>
+            <a:pPr>
+              <a:lnSpc>
+                <a:spcPct val="100000"/>
+              </a:lnSpc>
+              <a:spcBef>
+                <a:spcPts val="0"/>
+              </a:spcBef>
+              <a:spcAft>
+                <a:spcPts val="0"/>
+              </a:spcAft>
+            </a:pPr>
+            <a:r>
+              <a:rPr lang="en-US" noProof="1"/>
+              <a:t xml:space="preserve">  new CanalCatalogo(new ChannelFactory&lt;ICatalogWebService&gt;(binding,</a:t>
+            </a:r>
+          </a:p>
+          <a:p>
+            <a:pPr>
+              <a:lnSpc>
+                <a:spcPct val="100000"/>
+              </a:lnSpc>
+              <a:spcBef>
+                <a:spcPts val="0"/>
+              </a:spcBef>
+              <a:spcAft>
+                <a:spcPts val="0"/>
+              </a:spcAft>
+            </a:pPr>
+            <a:r>
+              <a:rPr lang="en-US" noProof="1"/>
+              <a:t xml:space="preserve">    new EndpointAddress(urlBase + "/CatalogWebService.svc"))),</a:t>
+            </a:r>
+          </a:p>
+          <a:p>
+            <a:pPr>
+              <a:lnSpc>
+                <a:spcPct val="100000"/>
+              </a:lnSpc>
+              <a:spcBef>
+                <a:spcPts val="0"/>
+              </a:spcBef>
+              <a:spcAft>
+                <a:spcPts val="0"/>
+              </a:spcAft>
+            </a:pPr>
+            <a:r>
+              <a:rPr lang="en-US" noProof="1"/>
+              <a:t xml:space="preserve">  new CanalConversor(new ChannelFactory&lt;IConverterWebService&gt;(binding,</a:t>
+            </a:r>
+          </a:p>
+          <a:p>
+            <a:pPr>
+              <a:lnSpc>
+                <a:spcPct val="100000"/>
+              </a:lnSpc>
+              <a:spcBef>
+                <a:spcPts val="0"/>
+              </a:spcBef>
+              <a:spcAft>
+                <a:spcPts val="0"/>
+              </a:spcAft>
+            </a:pPr>
+            <a:r>
+              <a:rPr lang="en-US" noProof="1"/>
+              <a:t xml:space="preserve">    new EndpointAddress(urlBase + "/ConverterWebService.svc"))),</a:t>
+            </a:r>
+          </a:p>
+          <a:p>
+            <a:pPr>
+              <a:lnSpc>
+                <a:spcPct val="100000"/>
+              </a:lnSpc>
+              <a:spcBef>
+                <a:spcPts val="0"/>
+              </a:spcBef>
+              <a:spcAft>
+                <a:spcPts val="0"/>
+              </a:spcAft>
+            </a:pPr>
+            <a:r>
+              <a:rPr lang="en-US" noProof="1"/>
+              <a:t xml:space="preserve">  sesion);</a:t>
+            </a:r>
+          </a:p>
+        </p:txBody>
+      </p:sp>
+      <p:sp>
+        <p:nvSpPr>
+          <p:cNvPr id="4" name="Text Placeholder 3">
+            <a:extLst>
+              <a:ext uri="{FF2B5EF4-FFF2-40B4-BE49-F238E27FC236}">
+                <a16:creationId xmlns:a16="http://schemas.microsoft.com/office/drawing/2014/main" id="{20A8AF34-9793-D88F-FF58-6E72CF9E4E62}"/>
+              </a:ext>
+            </a:extLst>
+          </p:cNvPr>
+          <p:cNvSpPr>
+            <a:spLocks noGrp="1"/>
+          </p:cNvSpPr>
+          <p:nvPr>
+            <p:ph type="body" sz="quarter" idx="12"/>
+          </p:nvPr>
+        </p:nvSpPr>
+        <p:spPr/>
+        <p:txBody>
+          <a:bodyPr/>
+          <a:lstStyle/>
+          <a:p>
+            <a:r>
               <a:rPr lang="es-MX"/>
-              <a:t> llama al servidor]</a:t>
-            </a:r>
-            <a:endParaRPr lang="es-EC"/>
-          </a:p>
-        </p:txBody>
-      </p:sp>
-      <p:sp>
-        <p:nvSpPr>
-          <p:cNvPr id="4" name="Text Placeholder 3">
-            <a:extLst>
-              <a:ext uri="{FF2B5EF4-FFF2-40B4-BE49-F238E27FC236}">
-                <a16:creationId xmlns:a16="http://schemas.microsoft.com/office/drawing/2014/main" id="{20A8AF34-9793-D88F-FF58-6E72CF9E4E62}"/>
-              </a:ext>
-            </a:extLst>
-          </p:cNvPr>
-          <p:cNvSpPr>
-            <a:spLocks noGrp="1"/>
-          </p:cNvSpPr>
-          <p:nvPr>
-            <p:ph type="body" sz="quarter" idx="12"/>
-          </p:nvPr>
-        </p:nvSpPr>
-        <p:spPr/>
-        <p:txBody>
-          <a:bodyPr/>
-          <a:lstStyle/>
+              <a:t>Crea un canal WCF (ChannelFactory) por cada servicio .svc con BasicHttpBinding, el enlace SOAP básico.</a:t>
+            </a:r>
+          </a:p>
           <a:p>
             <a:r>
               <a:rPr lang="es-MX"/>
-              <a:t>[Qué hace este fragmento.]</a:t>
-            </a:r>
-          </a:p>
-          <a:p>
-            <a:r>
-              <a:rPr lang="es-MX"/>
-              <a:t>[Cómo maneja errores o la sesión.]</a:t>
+              <a:t>Los tiempos de espera (5 s y 15 s) evitan esperas sin fin si el servidor no responde.</a:t>
             </a:r>
             <a:endParaRPr lang="es-EC"/>
           </a:p>
@@ -12904,7 +13659,7 @@
           <a:p>
             <a:r>
               <a:rPr lang="es-EC"/>
-              <a:t>[Tecnología] · patrón MVC</a:t>
+              <a:t>ASP.NET Core MVC + WCF · patrón MVC</a:t>
             </a:r>
           </a:p>
         </p:txBody>
@@ -12991,7 +13746,7 @@
           <a:p>
             <a:r>
               <a:rPr lang="es-MX"/>
-              <a:t>Proyecto WEB_CON_UNI_[JAVA | DOTNET]_[SOAP | RESTful] creado en [IDE].</a:t>
+              <a:t>Proyecto WEB_CON_UNI_DOTNET_SOAP creado en Visual Studio 2026.</a:t>
             </a:r>
           </a:p>
           <a:p>
@@ -13174,58 +13929,375 @@
           <a:p>
             <a:pPr>
               <a:lnSpc>
-                <a:spcPct val="110000"/>
+                <a:spcPct val="100000"/>
               </a:lnSpc>
+              <a:spcBef>
+                <a:spcPts val="0"/>
+              </a:spcBef>
+              <a:spcAft>
+                <a:spcPts val="0"/>
+              </a:spcAft>
             </a:pPr>
             <a:r>
-              <a:rPr lang="es-MX"/>
-              <a:t>[Pega aquí cómo el cliente</a:t>
+              <a:rPr lang="en-US" noProof="1"/>
+              <a:t xml:space="preserve">[HttpPost("/login")]</a:t>
             </a:r>
           </a:p>
           <a:p>
             <a:pPr>
               <a:lnSpc>
-                <a:spcPct val="110000"/>
+                <a:spcPct val="100000"/>
               </a:lnSpc>
+              <a:spcBef>
+                <a:spcPts val="0"/>
+              </a:spcBef>
+              <a:spcAft>
+                <a:spcPts val="0"/>
+              </a:spcAft>
             </a:pPr>
             <a:r>
+              <a:rPr lang="en-US" noProof="1"/>
+              <a:t xml:space="preserve">public async Task&lt;IActionResult&gt; Ingresar(</a:t>
+            </a:r>
+          </a:p>
+          <a:p>
+            <a:pPr>
+              <a:lnSpc>
+                <a:spcPct val="100000"/>
+              </a:lnSpc>
+              <a:spcBef>
+                <a:spcPts val="0"/>
+              </a:spcBef>
+              <a:spcAft>
+                <a:spcPts val="0"/>
+              </a:spcAft>
+            </a:pPr>
+            <a:r>
+              <a:rPr lang="en-US" noProof="1"/>
+              <a:t xml:space="preserve">  string? usuario, string? clave)</a:t>
+            </a:r>
+          </a:p>
+          <a:p>
+            <a:pPr>
+              <a:lnSpc>
+                <a:spcPct val="100000"/>
+              </a:lnSpc>
+              <a:spcBef>
+                <a:spcPts val="0"/>
+              </a:spcBef>
+              <a:spcAft>
+                <a:spcPts val="0"/>
+              </a:spcAft>
+            </a:pPr>
+            <a:r>
+              <a:rPr lang="en-US" noProof="1"/>
+              <a:t xml:space="preserve">{</a:t>
+            </a:r>
+          </a:p>
+          <a:p>
+            <a:pPr>
+              <a:lnSpc>
+                <a:spcPct val="100000"/>
+              </a:lnSpc>
+              <a:spcBef>
+                <a:spcPts val="0"/>
+              </a:spcBef>
+              <a:spcAft>
+                <a:spcPts val="0"/>
+              </a:spcAft>
+            </a:pPr>
+            <a:r>
+              <a:rPr lang="en-US" noProof="1"/>
+              <a:t xml:space="preserve">  var vista = new LoginVista { Usuario = usuario ?? "" };</a:t>
+            </a:r>
+          </a:p>
+          <a:p>
+            <a:pPr>
+              <a:lnSpc>
+                <a:spcPct val="100000"/>
+              </a:lnSpc>
+              <a:spcBef>
+                <a:spcPts val="0"/>
+              </a:spcBef>
+              <a:spcAft>
+                <a:spcPts val="0"/>
+              </a:spcAft>
+            </a:pPr>
+            <a:r>
+              <a:rPr lang="en-US" noProof="1"/>
+              <a:t xml:space="preserve">  // ... validación de campos vacíos</a:t>
+            </a:r>
+          </a:p>
+          <a:p>
+            <a:pPr>
+              <a:lnSpc>
+                <a:spcPct val="100000"/>
+              </a:lnSpc>
+              <a:spcBef>
+                <a:spcPts val="0"/>
+              </a:spcBef>
+              <a:spcAft>
+                <a:spcPts val="0"/>
+              </a:spcAft>
+            </a:pPr>
+            <a:r>
+              <a:rPr lang="en-US" noProof="1"/>
+              <a:t xml:space="preserve">  var sesion = new Sesion();</a:t>
+            </a:r>
+          </a:p>
+          <a:p>
+            <a:pPr>
+              <a:lnSpc>
+                <a:spcPct val="100000"/>
+              </a:lnSpc>
+              <a:spcBef>
+                <a:spcPts val="0"/>
+              </a:spcBef>
+              <a:spcAft>
+                <a:spcPts val="0"/>
+              </a:spcAft>
+            </a:pPr>
+            <a:r>
+              <a:rPr lang="en-US" noProof="1"/>
+              <a:t xml:space="preserve">  try</a:t>
+            </a:r>
+          </a:p>
+          <a:p>
+            <a:pPr>
+              <a:lnSpc>
+                <a:spcPct val="100000"/>
+              </a:lnSpc>
+              <a:spcBef>
+                <a:spcPts val="0"/>
+              </a:spcBef>
+              <a:spcAft>
+                <a:spcPts val="0"/>
+              </a:spcAft>
+            </a:pPr>
+            <a:r>
+              <a:rPr lang="en-US" noProof="1"/>
+              <a:t xml:space="preserve">  {</a:t>
+            </a:r>
+          </a:p>
+          <a:p>
+            <a:pPr>
+              <a:lnSpc>
+                <a:spcPct val="100000"/>
+              </a:lnSpc>
+              <a:spcBef>
+                <a:spcPts val="0"/>
+              </a:spcBef>
+              <a:spcAft>
+                <a:spcPts val="0"/>
+              </a:spcAft>
+            </a:pPr>
+            <a:r>
+              <a:rPr lang="en-US" noProof="1"/>
+              <a:t xml:space="preserve">    await fabrica.CrearServicio(sesion)</a:t>
+            </a:r>
+          </a:p>
+          <a:p>
+            <a:pPr>
+              <a:lnSpc>
+                <a:spcPct val="100000"/>
+              </a:lnSpc>
+              <a:spcBef>
+                <a:spcPts val="0"/>
+              </a:spcBef>
+              <a:spcAft>
+                <a:spcPts val="0"/>
+              </a:spcAft>
+            </a:pPr>
+            <a:r>
+              <a:rPr lang="en-US" noProof="1"/>
+              <a:t xml:space="preserve">      .IniciarSesionAsync(usuario.Trim(), clave);</a:t>
+            </a:r>
+          </a:p>
+          <a:p>
+            <a:pPr>
+              <a:lnSpc>
+                <a:spcPct val="100000"/>
+              </a:lnSpc>
+              <a:spcBef>
+                <a:spcPts val="0"/>
+              </a:spcBef>
+              <a:spcAft>
+                <a:spcPts val="0"/>
+              </a:spcAft>
+            </a:pPr>
+            <a:r>
+              <a:rPr lang="en-US" noProof="1"/>
+              <a:t xml:space="preserve">  }</a:t>
+            </a:r>
+          </a:p>
+          <a:p>
+            <a:pPr>
+              <a:lnSpc>
+                <a:spcPct val="100000"/>
+              </a:lnSpc>
+              <a:spcBef>
+                <a:spcPts val="0"/>
+              </a:spcBef>
+              <a:spcAft>
+                <a:spcPts val="0"/>
+              </a:spcAft>
+            </a:pPr>
+            <a:r>
+              <a:rPr lang="en-US" noProof="1"/>
+              <a:t xml:space="preserve">  catch (ServicioException e)</a:t>
+            </a:r>
+          </a:p>
+          <a:p>
+            <a:pPr>
+              <a:lnSpc>
+                <a:spcPct val="100000"/>
+              </a:lnSpc>
+              <a:spcBef>
+                <a:spcPts val="0"/>
+              </a:spcBef>
+              <a:spcAft>
+                <a:spcPts val="0"/>
+              </a:spcAft>
+            </a:pPr>
+            <a:r>
+              <a:rPr lang="en-US" noProof="1"/>
+              <a:t xml:space="preserve">  {</a:t>
+            </a:r>
+          </a:p>
+          <a:p>
+            <a:pPr>
+              <a:lnSpc>
+                <a:spcPct val="100000"/>
+              </a:lnSpc>
+              <a:spcBef>
+                <a:spcPts val="0"/>
+              </a:spcBef>
+              <a:spcAft>
+                <a:spcPts val="0"/>
+              </a:spcAft>
+            </a:pPr>
+            <a:r>
+              <a:rPr lang="en-US" noProof="1"/>
+              <a:t xml:space="preserve">    vista.Error = e.Message;</a:t>
+            </a:r>
+          </a:p>
+          <a:p>
+            <a:pPr>
+              <a:lnSpc>
+                <a:spcPct val="100000"/>
+              </a:lnSpc>
+              <a:spcBef>
+                <a:spcPts val="0"/>
+              </a:spcBef>
+              <a:spcAft>
+                <a:spcPts val="0"/>
+              </a:spcAft>
+            </a:pPr>
+            <a:r>
+              <a:rPr lang="en-US" noProof="1"/>
+              <a:t xml:space="preserve">    return await VistaAsync(vista);</a:t>
+            </a:r>
+          </a:p>
+          <a:p>
+            <a:pPr>
+              <a:lnSpc>
+                <a:spcPct val="100000"/>
+              </a:lnSpc>
+              <a:spcBef>
+                <a:spcPts val="0"/>
+              </a:spcBef>
+              <a:spcAft>
+                <a:spcPts val="0"/>
+              </a:spcAft>
+            </a:pPr>
+            <a:r>
+              <a:rPr lang="en-US" noProof="1"/>
+              <a:t xml:space="preserve">  }</a:t>
+            </a:r>
+          </a:p>
+          <a:p>
+            <a:pPr>
+              <a:lnSpc>
+                <a:spcPct val="100000"/>
+              </a:lnSpc>
+              <a:spcBef>
+                <a:spcPts val="0"/>
+              </a:spcBef>
+              <a:spcAft>
+                <a:spcPts val="0"/>
+              </a:spcAft>
+            </a:pPr>
+            <a:r>
+              <a:rPr lang="en-US" noProof="1"/>
+              <a:t xml:space="preserve">  SesionUsuario.Guardar(HttpContext, sesion);</a:t>
+            </a:r>
+          </a:p>
+          <a:p>
+            <a:pPr>
+              <a:lnSpc>
+                <a:spcPct val="100000"/>
+              </a:lnSpc>
+              <a:spcBef>
+                <a:spcPts val="0"/>
+              </a:spcBef>
+              <a:spcAft>
+                <a:spcPts val="0"/>
+              </a:spcAft>
+            </a:pPr>
+            <a:r>
+              <a:rPr lang="en-US" noProof="1"/>
+              <a:t xml:space="preserve">  return Redirect("~/menu");</a:t>
+            </a:r>
+          </a:p>
+          <a:p>
+            <a:pPr>
+              <a:lnSpc>
+                <a:spcPct val="100000"/>
+              </a:lnSpc>
+              <a:spcBef>
+                <a:spcPts val="0"/>
+              </a:spcBef>
+              <a:spcAft>
+                <a:spcPts val="0"/>
+              </a:spcAft>
+            </a:pPr>
+            <a:r>
+              <a:rPr lang="en-US" noProof="1"/>
+              <a:t xml:space="preserve">}</a:t>
+            </a:r>
+          </a:p>
+        </p:txBody>
+      </p:sp>
+      <p:sp>
+        <p:nvSpPr>
+          <p:cNvPr id="4" name="Text Placeholder 3">
+            <a:extLst>
+              <a:ext uri="{FF2B5EF4-FFF2-40B4-BE49-F238E27FC236}">
+                <a16:creationId xmlns:a16="http://schemas.microsoft.com/office/drawing/2014/main" id="{083ED04C-DD32-D005-5F14-AF65141A1F3E}"/>
+              </a:ext>
+            </a:extLst>
+          </p:cNvPr>
+          <p:cNvSpPr>
+            <a:spLocks noGrp="1"/>
+          </p:cNvSpPr>
+          <p:nvPr>
+            <p:ph type="body" sz="quarter" idx="12"/>
+          </p:nvPr>
+        </p:nvSpPr>
+        <p:spPr/>
+        <p:txBody>
+          <a:bodyPr/>
+          <a:lstStyle/>
+          <a:p>
+            <a:r>
               <a:rPr lang="es-MX"/>
-              <a:t> llama al servidor]</a:t>
-            </a:r>
-            <a:endParaRPr lang="es-EC"/>
-          </a:p>
-        </p:txBody>
-      </p:sp>
-      <p:sp>
-        <p:nvSpPr>
-          <p:cNvPr id="4" name="Text Placeholder 3">
-            <a:extLst>
-              <a:ext uri="{FF2B5EF4-FFF2-40B4-BE49-F238E27FC236}">
-                <a16:creationId xmlns:a16="http://schemas.microsoft.com/office/drawing/2014/main" id="{083ED04C-DD32-D005-5F14-AF65141A1F3E}"/>
-              </a:ext>
-            </a:extLst>
-          </p:cNvPr>
-          <p:cNvSpPr>
-            <a:spLocks noGrp="1"/>
-          </p:cNvSpPr>
-          <p:nvPr>
-            <p:ph type="body" sz="quarter" idx="12"/>
-          </p:nvPr>
-        </p:nvSpPr>
-        <p:spPr/>
-        <p:txBody>
-          <a:bodyPr/>
-          <a:lstStyle/>
+              <a:t>El controlador MVC recibe el formulario y llama al servidor SOAP a través de FabricaServicios (canales WCF).</a:t>
+            </a:r>
+          </a:p>
           <a:p>
             <a:r>
               <a:rPr lang="es-MX"/>
-              <a:t>[Qué hace este fragmento.]</a:t>
-            </a:r>
-          </a:p>
-          <a:p>
-            <a:r>
-              <a:rPr lang="es-MX"/>
-              <a:t>[Cómo maneja errores o la sesión.]</a:t>
+              <a:t>Si el login falla, vuelve a mostrar la vista con el mensaje; si funciona, guarda la sesión y va al menú.</a:t>
             </a:r>
             <a:endParaRPr lang="es-EC"/>
           </a:p>
@@ -13656,7 +14728,7 @@
           <a:p>
             <a:r>
               <a:rPr lang="es-EC"/>
-              <a:t>[Tecnología] · patrón MVC</a:t>
+              <a:t>.NET MAUI (Android) · patrón MVC</a:t>
             </a:r>
           </a:p>
         </p:txBody>
@@ -13778,7 +14850,7 @@
             </a:r>
             <a:r>
               <a:rPr lang="es-EC" sz="2200"/>
-              <a:t>   Servidor [SOAP | RESTful]</a:t>
+              <a:t xml:space="preserve">   Servidor SOAP</a:t>
             </a:r>
           </a:p>
           <a:p>
@@ -14068,7 +15140,7 @@
           <a:p>
             <a:r>
               <a:rPr lang="es-MX"/>
-              <a:t>Proyecto MOV_CON_UNI_[JAVA | DOTNET]_[SOAP | RESTful] creado en [IDE].</a:t>
+              <a:t>Proyecto MOV_CON_UNI_DOTNET_SOAP creado en Visual Studio 2026.</a:t>
             </a:r>
           </a:p>
           <a:p>
@@ -14251,58 +15323,358 @@
           <a:p>
             <a:pPr>
               <a:lnSpc>
-                <a:spcPct val="110000"/>
+                <a:spcPct val="100000"/>
               </a:lnSpc>
+              <a:spcBef>
+                <a:spcPts val="0"/>
+              </a:spcBef>
+              <a:spcAft>
+                <a:spcPts val="0"/>
+              </a:spcAft>
             </a:pPr>
             <a:r>
-              <a:rPr lang="es-MX"/>
-              <a:t>[Pega aquí cómo el cliente</a:t>
+              <a:rPr lang="en-US" noProof="1"/>
+              <a:t xml:space="preserve">var client = new SoapLogin.LoginWebServiceClient(</a:t>
             </a:r>
           </a:p>
           <a:p>
             <a:pPr>
               <a:lnSpc>
-                <a:spcPct val="110000"/>
+                <a:spcPct val="100000"/>
               </a:lnSpc>
+              <a:spcBef>
+                <a:spcPts val="0"/>
+              </a:spcBef>
+              <a:spcAft>
+                <a:spcPts val="0"/>
+              </a:spcAft>
             </a:pPr>
             <a:r>
+              <a:rPr lang="en-US" noProof="1"/>
+              <a:t xml:space="preserve">  SoapLogin.LoginWebServiceClient.EndpointConfiguration</a:t>
+            </a:r>
+          </a:p>
+          <a:p>
+            <a:pPr>
+              <a:lnSpc>
+                <a:spcPct val="100000"/>
+              </a:lnSpc>
+              <a:spcBef>
+                <a:spcPts val="0"/>
+              </a:spcBef>
+              <a:spcAft>
+                <a:spcPts val="0"/>
+              </a:spcAft>
+            </a:pPr>
+            <a:r>
+              <a:rPr lang="en-US" noProof="1"/>
+              <a:t xml:space="preserve">    .BasicHttpBinding_ILoginWebService_soap,</a:t>
+            </a:r>
+          </a:p>
+          <a:p>
+            <a:pPr>
+              <a:lnSpc>
+                <a:spcPct val="100000"/>
+              </a:lnSpc>
+              <a:spcBef>
+                <a:spcPts val="0"/>
+              </a:spcBef>
+              <a:spcAft>
+                <a:spcPts val="0"/>
+              </a:spcAft>
+            </a:pPr>
+            <a:r>
+              <a:rPr lang="en-US" noProof="1"/>
+              <a:t xml:space="preserve">  SoapConfig.BaseUrl + "/LoginWebService.svc");</a:t>
+            </a:r>
+          </a:p>
+          <a:p>
+            <a:pPr>
+              <a:lnSpc>
+                <a:spcPct val="100000"/>
+              </a:lnSpc>
+              <a:spcBef>
+                <a:spcPts val="0"/>
+              </a:spcBef>
+              <a:spcAft>
+                <a:spcPts val="0"/>
+              </a:spcAft>
+            </a:pPr>
+            <a:r>
+              <a:rPr lang="en-US" noProof="1"/>
+              <a:t xml:space="preserve">try</a:t>
+            </a:r>
+          </a:p>
+          <a:p>
+            <a:pPr>
+              <a:lnSpc>
+                <a:spcPct val="100000"/>
+              </a:lnSpc>
+              <a:spcBef>
+                <a:spcPts val="0"/>
+              </a:spcBef>
+              <a:spcAft>
+                <a:spcPts val="0"/>
+              </a:spcAft>
+            </a:pPr>
+            <a:r>
+              <a:rPr lang="en-US" noProof="1"/>
+              <a:t xml:space="preserve">{</a:t>
+            </a:r>
+          </a:p>
+          <a:p>
+            <a:pPr>
+              <a:lnSpc>
+                <a:spcPct val="100000"/>
+              </a:lnSpc>
+              <a:spcBef>
+                <a:spcPts val="0"/>
+              </a:spcBef>
+              <a:spcAft>
+                <a:spcPts val="0"/>
+              </a:spcAft>
+            </a:pPr>
+            <a:r>
+              <a:rPr lang="en-US" noProof="1"/>
+              <a:t xml:space="preserve">  var response = await client.LoginAsync(username, password);</a:t>
+            </a:r>
+          </a:p>
+          <a:p>
+            <a:pPr>
+              <a:lnSpc>
+                <a:spcPct val="100000"/>
+              </a:lnSpc>
+              <a:spcBef>
+                <a:spcPts val="0"/>
+              </a:spcBef>
+              <a:spcAft>
+                <a:spcPts val="0"/>
+              </a:spcAft>
+            </a:pPr>
+            <a:r>
+              <a:rPr lang="en-US" noProof="1"/>
+              <a:t xml:space="preserve">  await client.CloseAsync();</a:t>
+            </a:r>
+          </a:p>
+          <a:p>
+            <a:pPr>
+              <a:lnSpc>
+                <a:spcPct val="100000"/>
+              </a:lnSpc>
+              <a:spcBef>
+                <a:spcPts val="0"/>
+              </a:spcBef>
+              <a:spcAft>
+                <a:spcPts val="0"/>
+              </a:spcAft>
+            </a:pPr>
+            <a:r>
+              <a:rPr lang="en-US" noProof="1"/>
+              <a:t xml:space="preserve">  var dto = response.Body.LoginResult;</a:t>
+            </a:r>
+          </a:p>
+          <a:p>
+            <a:pPr>
+              <a:lnSpc>
+                <a:spcPct val="100000"/>
+              </a:lnSpc>
+              <a:spcBef>
+                <a:spcPts val="0"/>
+              </a:spcBef>
+              <a:spcAft>
+                <a:spcPts val="0"/>
+              </a:spcAft>
+            </a:pPr>
+            <a:r>
+              <a:rPr lang="en-US" noProof="1"/>
+              <a:t xml:space="preserve">  return new LoginResult(dto.estado == SoapLogin.EstadosEnum.OK,</a:t>
+            </a:r>
+          </a:p>
+          <a:p>
+            <a:pPr>
+              <a:lnSpc>
+                <a:spcPct val="100000"/>
+              </a:lnSpc>
+              <a:spcBef>
+                <a:spcPts val="0"/>
+              </a:spcBef>
+              <a:spcAft>
+                <a:spcPts val="0"/>
+              </a:spcAft>
+            </a:pPr>
+            <a:r>
+              <a:rPr lang="en-US" noProof="1"/>
+              <a:t xml:space="preserve">    dto.mensaje ?? "", dto.token);</a:t>
+            </a:r>
+          </a:p>
+          <a:p>
+            <a:pPr>
+              <a:lnSpc>
+                <a:spcPct val="100000"/>
+              </a:lnSpc>
+              <a:spcBef>
+                <a:spcPts val="0"/>
+              </a:spcBef>
+              <a:spcAft>
+                <a:spcPts val="0"/>
+              </a:spcAft>
+            </a:pPr>
+            <a:r>
+              <a:rPr lang="en-US" noProof="1"/>
+              <a:t xml:space="preserve">}</a:t>
+            </a:r>
+          </a:p>
+          <a:p>
+            <a:pPr>
+              <a:lnSpc>
+                <a:spcPct val="100000"/>
+              </a:lnSpc>
+              <a:spcBef>
+                <a:spcPts val="0"/>
+              </a:spcBef>
+              <a:spcAft>
+                <a:spcPts val="0"/>
+              </a:spcAft>
+            </a:pPr>
+            <a:r>
+              <a:rPr lang="en-US" noProof="1"/>
+              <a:t xml:space="preserve">catch (Exception ex) when (ex is CommunicationException</a:t>
+            </a:r>
+          </a:p>
+          <a:p>
+            <a:pPr>
+              <a:lnSpc>
+                <a:spcPct val="100000"/>
+              </a:lnSpc>
+              <a:spcBef>
+                <a:spcPts val="0"/>
+              </a:spcBef>
+              <a:spcAft>
+                <a:spcPts val="0"/>
+              </a:spcAft>
+            </a:pPr>
+            <a:r>
+              <a:rPr lang="en-US" noProof="1"/>
+              <a:t xml:space="preserve">                             or TimeoutException)</a:t>
+            </a:r>
+          </a:p>
+          <a:p>
+            <a:pPr>
+              <a:lnSpc>
+                <a:spcPct val="100000"/>
+              </a:lnSpc>
+              <a:spcBef>
+                <a:spcPts val="0"/>
+              </a:spcBef>
+              <a:spcAft>
+                <a:spcPts val="0"/>
+              </a:spcAft>
+            </a:pPr>
+            <a:r>
+              <a:rPr lang="en-US" noProof="1"/>
+              <a:t xml:space="preserve">{</a:t>
+            </a:r>
+          </a:p>
+          <a:p>
+            <a:pPr>
+              <a:lnSpc>
+                <a:spcPct val="100000"/>
+              </a:lnSpc>
+              <a:spcBef>
+                <a:spcPts val="0"/>
+              </a:spcBef>
+              <a:spcAft>
+                <a:spcPts val="0"/>
+              </a:spcAft>
+            </a:pPr>
+            <a:r>
+              <a:rPr lang="en-US" noProof="1"/>
+              <a:t xml:space="preserve">  client.Abort();</a:t>
+            </a:r>
+          </a:p>
+          <a:p>
+            <a:pPr>
+              <a:lnSpc>
+                <a:spcPct val="100000"/>
+              </a:lnSpc>
+              <a:spcBef>
+                <a:spcPts val="0"/>
+              </a:spcBef>
+              <a:spcAft>
+                <a:spcPts val="0"/>
+              </a:spcAft>
+            </a:pPr>
+            <a:r>
+              <a:rPr lang="en-US" noProof="1"/>
+              <a:t xml:space="preserve">  return new LoginResult(false,</a:t>
+            </a:r>
+          </a:p>
+          <a:p>
+            <a:pPr>
+              <a:lnSpc>
+                <a:spcPct val="100000"/>
+              </a:lnSpc>
+              <a:spcBef>
+                <a:spcPts val="0"/>
+              </a:spcBef>
+              <a:spcAft>
+                <a:spcPts val="0"/>
+              </a:spcAft>
+            </a:pPr>
+            <a:r>
+              <a:rPr lang="en-US" noProof="1"/>
+              <a:t xml:space="preserve">    "No se pudo conectar con el servidor", null);</a:t>
+            </a:r>
+          </a:p>
+          <a:p>
+            <a:pPr>
+              <a:lnSpc>
+                <a:spcPct val="100000"/>
+              </a:lnSpc>
+              <a:spcBef>
+                <a:spcPts val="0"/>
+              </a:spcBef>
+              <a:spcAft>
+                <a:spcPts val="0"/>
+              </a:spcAft>
+            </a:pPr>
+            <a:r>
+              <a:rPr lang="en-US" noProof="1"/>
+              <a:t xml:space="preserve">}</a:t>
+            </a:r>
+          </a:p>
+        </p:txBody>
+      </p:sp>
+      <p:sp>
+        <p:nvSpPr>
+          <p:cNvPr id="4" name="Text Placeholder 3">
+            <a:extLst>
+              <a:ext uri="{FF2B5EF4-FFF2-40B4-BE49-F238E27FC236}">
+                <a16:creationId xmlns:a16="http://schemas.microsoft.com/office/drawing/2014/main" id="{8FA2B0E7-A824-A64D-CD4D-F66FF99B63E7}"/>
+              </a:ext>
+            </a:extLst>
+          </p:cNvPr>
+          <p:cNvSpPr>
+            <a:spLocks noGrp="1"/>
+          </p:cNvSpPr>
+          <p:nvPr>
+            <p:ph type="body" sz="quarter" idx="12"/>
+          </p:nvPr>
+        </p:nvSpPr>
+        <p:spPr/>
+        <p:txBody>
+          <a:bodyPr/>
+          <a:lstStyle/>
+          <a:p>
+            <a:r>
               <a:rPr lang="es-MX"/>
-              <a:t> llama al servidor]</a:t>
-            </a:r>
-            <a:endParaRPr lang="es-EC"/>
-          </a:p>
-        </p:txBody>
-      </p:sp>
-      <p:sp>
-        <p:nvSpPr>
-          <p:cNvPr id="4" name="Text Placeholder 3">
-            <a:extLst>
-              <a:ext uri="{FF2B5EF4-FFF2-40B4-BE49-F238E27FC236}">
-                <a16:creationId xmlns:a16="http://schemas.microsoft.com/office/drawing/2014/main" id="{8FA2B0E7-A824-A64D-CD4D-F66FF99B63E7}"/>
-              </a:ext>
-            </a:extLst>
-          </p:cNvPr>
-          <p:cNvSpPr>
-            <a:spLocks noGrp="1"/>
-          </p:cNvSpPr>
-          <p:nvPr>
-            <p:ph type="body" sz="quarter" idx="12"/>
-          </p:nvPr>
-        </p:nvSpPr>
-        <p:spPr/>
-        <p:txBody>
-          <a:bodyPr/>
-          <a:lstStyle/>
+              <a:t>La app MAUI usa el cliente WCF generado y apunta a la IP de la PC en la red (SoapConfig.BaseUrl).</a:t>
+            </a:r>
+          </a:p>
           <a:p>
             <a:r>
               <a:rPr lang="es-MX"/>
-              <a:t>[Qué hace este fragmento.]</a:t>
-            </a:r>
-          </a:p>
-          <a:p>
-            <a:r>
-              <a:rPr lang="es-MX"/>
-              <a:t>[Cómo maneja errores o la sesión.]</a:t>
+              <a:t>Si no hay conexión o se agota el tiempo, cierra el canal y muestra "No se pudo conectar con el servidor".</a:t>
             </a:r>
             <a:endParaRPr lang="es-EC"/>
           </a:p>
@@ -16492,19 +17864,19 @@
           <a:p>
             <a:r>
               <a:rPr lang="es-MX"/>
-              <a:t>[Pruebas automáticas: N pruebas, todas correctas.]</a:t>
+              <a:t>107 pruebas automáticas: escritorio (59) y web (48).</a:t>
             </a:r>
           </a:p>
           <a:p>
             <a:r>
               <a:rPr lang="es-MX"/>
-              <a:t>[Herramienta usada: JUnit | xUnit].</a:t>
+              <a:t>Herramienta usada: xUnit.</a:t>
             </a:r>
           </a:p>
           <a:p>
             <a:r>
               <a:rPr lang="es-MX"/>
-              <a:t>[Observaciones encontradas durante las pruebas.]</a:t>
+              <a:t>El servidor se probó además con SoapUI (DOTNET-Server-soapui-project.xml).</a:t>
             </a:r>
             <a:endParaRPr lang="es-EC"/>
           </a:p>
@@ -16669,7 +18041,7 @@
           <a:p>
             <a:r>
               <a:rPr lang="es-MX"/>
-              <a:t>El servidor [SOAP | RESTful] fue consumido por cuatro clientes distintos sin cambiar su lógica, lo que muestra la interoperabilidad de una arquitectura orientada a servicios.</a:t>
+              <a:t>El servidor SOAP fue consumido por cuatro clientes distintos sin cambiar su lógica, lo que muestra la interoperabilidad de una arquitectura orientada a servicios.</a:t>
             </a:r>
           </a:p>
           <a:p>
@@ -16687,7 +18059,7 @@
           <a:p>
             <a:r>
               <a:rPr lang="es-MX"/>
-              <a:t>[Conclusión propia del proyecto.]</a:t>
+              <a:t>SoapCore permitió publicar servicios SOAP con su contrato WSDL sobre ASP.NET Core, sin depender de WCF en el servidor.</a:t>
             </a:r>
             <a:endParaRPr lang="es-EC"/>
           </a:p>
@@ -16840,7 +18212,7 @@
           <a:p>
             <a:r>
               <a:rPr lang="es-MX"/>
-              <a:t>Usar HTTPS [y WS-Security] para proteger el token en la red.</a:t>
+              <a:t>Usar HTTPS y WS-Security para proteger el token en la red.</a:t>
             </a:r>
           </a:p>
           <a:p>
@@ -16852,7 +18224,7 @@
           <a:p>
             <a:r>
               <a:rPr lang="es-MX"/>
-              <a:t>[Recomendación propia del proyecto.]</a:t>
+              <a:t>Regenerar las referencias de servicio de los clientes cada vez que cambie el contrato WSDL del servidor.</a:t>
             </a:r>
             <a:endParaRPr lang="es-EC"/>
           </a:p>
@@ -17039,7 +18411,7 @@
             </a:pPr>
             <a:r>
               <a:rPr lang="es-EC" sz="1500"/>
-              <a:t>[Autor. (Año). Título. Editorial o URL.]</a:t>
+              <a:t>SoapCore. (2026). SOAP extension for ASP.NET Core. https://github.com/DigDes/SoapCore</a:t>
             </a:r>
           </a:p>
         </p:txBody>
@@ -17288,7 +18660,7 @@
             </a:pPr>
             <a:r>
               <a:rPr lang="es-MX"/>
-              <a:t>Desarrollar un sistema de conversión de unidades basado en un servicio web [SOAP | RESTful] en [JAVA | .NET], sin base de datos, consumido por clientes de consola, escritorio, web y móvil.</a:t>
+              <a:t>Desarrollar un sistema de conversión de unidades basado en un servicio web SOAP en .NET, sin base de datos, consumido por clientes de consola, escritorio, web y móvil.</a:t>
             </a:r>
             <a:endParaRPr lang="es-EC"/>
           </a:p>
@@ -17331,7 +18703,7 @@
           <a:p>
             <a:r>
               <a:rPr lang="es-MX"/>
-              <a:t>Implementar el servidor [SOAP | RESTful] con autenticación por token y conversión de seis magnitudes.</a:t>
+              <a:t>Implementar el servidor SOAP con autenticación por token y conversión de seis magnitudes.</a:t>
             </a:r>
           </a:p>
           <a:p>
@@ -17577,7 +18949,7 @@
           <a:p>
             <a:r>
               <a:rPr lang="es-MX"/>
-              <a:t>[SOAP y WSDL | REST y JSON]</a:t>
+              <a:t>SOAP y WSDL</a:t>
             </a:r>
             <a:endParaRPr lang="es-EC"/>
           </a:p>
@@ -17606,19 +18978,13 @@
           <a:p>
             <a:r>
               <a:rPr lang="es-MX"/>
-              <a:t>[SOAP] Intercambia mensajes XML dentro de un sobre (Envelope). Un contrato WSDL describe las operaciones del servicio.</a:t>
+              <a:t>Intercambia mensajes XML dentro de un sobre (Envelope). Un contrato WSDL describe las operaciones del servicio.</a:t>
             </a:r>
           </a:p>
           <a:p>
             <a:r>
               <a:rPr lang="es-MX"/>
-              <a:t>[RESTful] Expone recursos por URL que se usan con verbos HTTP (GET, POST) e intercambian datos en JSON.</a:t>
-            </a:r>
-          </a:p>
-          <a:p>
-            <a:r>
-              <a:rPr lang="es-MX"/>
-              <a:t>[Borra la opción que no corresponde y agrega una ventaja del protocolo.]</a:t>
+              <a:t>Ventaja: los clientes se generan automáticamente desde el WSDL (referencia de servicio WCF).</a:t>
             </a:r>
             <a:endParaRPr lang="es-EC"/>
           </a:p>
@@ -18234,7 +19600,7 @@
                           </a:solidFill>
                           <a:latin typeface="Segoe UI" panose="020B0502040204020203" pitchFamily="34" charset="0"/>
                         </a:rPr>
-                        <a:t>[Ej.: ASP.NET Core + SoapCore | Jakarta EE en Payara]</a:t>
+                        <a:t>ASP.NET Core + SoapCore</a:t>
                       </a:r>
                       <a:endParaRPr lang="es-EC" sz="1400">
                         <a:solidFill>
@@ -18272,7 +19638,7 @@
                           </a:solidFill>
                           <a:latin typeface="Segoe UI" panose="020B0502040204020203" pitchFamily="34" charset="0"/>
                         </a:rPr>
-                        <a:t>[x.y]</a:t>
+                        <a:t>.NET 10 · SoapCore 1.2</a:t>
                       </a:r>
                     </a:p>
                   </a:txBody>
@@ -18343,7 +19709,7 @@
                           </a:solidFill>
                           <a:latin typeface="Segoe UI" panose="020B0502040204020203" pitchFamily="34" charset="0"/>
                         </a:rPr>
-                        <a:t>[Tecnología]</a:t>
+                        <a:t>.NET + cliente WCF generado</a:t>
                       </a:r>
                     </a:p>
                   </a:txBody>
@@ -18375,7 +19741,7 @@
                           </a:solidFill>
                           <a:latin typeface="Segoe UI" panose="020B0502040204020203" pitchFamily="34" charset="0"/>
                         </a:rPr>
-                        <a:t>[x.y]</a:t>
+                        <a:t>.NET 10</a:t>
                       </a:r>
                     </a:p>
                   </a:txBody>
@@ -18446,7 +19812,7 @@
                           </a:solidFill>
                           <a:latin typeface="Segoe UI" panose="020B0502040204020203" pitchFamily="34" charset="0"/>
                         </a:rPr>
-                        <a:t>[Tecnología]</a:t>
+                        <a:t>WinForms + WCF (ChannelFactory)</a:t>
                       </a:r>
                     </a:p>
                   </a:txBody>
@@ -18478,7 +19844,7 @@
                           </a:solidFill>
                           <a:latin typeface="Segoe UI" panose="020B0502040204020203" pitchFamily="34" charset="0"/>
                         </a:rPr>
-                        <a:t>[x.y]</a:t>
+                        <a:t>.NET 10</a:t>
                       </a:r>
                     </a:p>
                   </a:txBody>
@@ -18549,7 +19915,7 @@
                           </a:solidFill>
                           <a:latin typeface="Segoe UI" panose="020B0502040204020203" pitchFamily="34" charset="0"/>
                         </a:rPr>
-                        <a:t>[Tecnología]</a:t>
+                        <a:t>ASP.NET Core MVC + WCF (ChannelFactory)</a:t>
                       </a:r>
                     </a:p>
                   </a:txBody>
@@ -18581,7 +19947,7 @@
                           </a:solidFill>
                           <a:latin typeface="Segoe UI" panose="020B0502040204020203" pitchFamily="34" charset="0"/>
                         </a:rPr>
-                        <a:t>[x.y]</a:t>
+                        <a:t>.NET 10</a:t>
                       </a:r>
                     </a:p>
                   </a:txBody>
@@ -18652,7 +20018,7 @@
                           </a:solidFill>
                           <a:latin typeface="Segoe UI" panose="020B0502040204020203" pitchFamily="34" charset="0"/>
                         </a:rPr>
-                        <a:t>[Tecnología]</a:t>
+                        <a:t>.NET MAUI (Android) + cliente WCF</a:t>
                       </a:r>
                     </a:p>
                   </a:txBody>
@@ -18684,7 +20050,7 @@
                           </a:solidFill>
                           <a:latin typeface="Segoe UI" panose="020B0502040204020203" pitchFamily="34" charset="0"/>
                         </a:rPr>
-                        <a:t>[x.y]</a:t>
+                        <a:t>.NET 10</a:t>
                       </a:r>
                     </a:p>
                   </a:txBody>
@@ -18755,7 +20121,7 @@
                           </a:solidFill>
                           <a:latin typeface="Segoe UI" panose="020B0502040204020203" pitchFamily="34" charset="0"/>
                         </a:rPr>
-                        <a:t>[IDE, gestor de paquetes, emulador]</a:t>
+                        <a:t>Visual Studio 2026, NuGet, emulador Android</a:t>
                       </a:r>
                     </a:p>
                   </a:txBody>
@@ -18787,7 +20153,7 @@
                           </a:solidFill>
                           <a:latin typeface="Segoe UI" panose="020B0502040204020203" pitchFamily="34" charset="0"/>
                         </a:rPr>
-                        <a:t>[x.y]</a:t>
+                        <a:t>VS 2026</a:t>
                       </a:r>
                     </a:p>
                   </a:txBody>
@@ -19012,7 +20378,7 @@
                 </a:solidFill>
                 <a:latin typeface="Segoe UI Semibold" panose="020B0702040204020203" pitchFamily="34" charset="0"/>
               </a:rPr>
-              <a:t>Servidor [SOAP | RESTful]</a:t>
+              <a:t>Servidor SOAP</a:t>
             </a:r>
           </a:p>
           <a:p>
@@ -19028,7 +20394,7 @@
                 </a:solidFill>
                 <a:latin typeface="Segoe UI" panose="020B0502040204020203" pitchFamily="34" charset="0"/>
               </a:rPr>
-              <a:t>[JAVA | .NET] · [localhost:puerto]</a:t>
+              <a:t>.NET · localhost:5052</a:t>
             </a:r>
           </a:p>
           <a:p>
@@ -19132,7 +20498,7 @@
                 </a:solidFill>
                 <a:latin typeface="Segoe UI" panose="020B0502040204020203" pitchFamily="34" charset="0"/>
               </a:rPr>
-              <a:t>[Tecnología]</a:t>
+              <a:t>.NET (consola)</a:t>
             </a:r>
           </a:p>
         </p:txBody>
@@ -19263,7 +20629,7 @@
                 </a:solidFill>
                 <a:latin typeface="Segoe UI" panose="020B0502040204020203" pitchFamily="34" charset="0"/>
               </a:rPr>
-              <a:t>[Tecnología]</a:t>
+              <a:t>WinForms</a:t>
             </a:r>
           </a:p>
         </p:txBody>
@@ -19394,7 +20760,7 @@
                 </a:solidFill>
                 <a:latin typeface="Segoe UI" panose="020B0502040204020203" pitchFamily="34" charset="0"/>
               </a:rPr>
-              <a:t>[Tecnología]</a:t>
+              <a:t>ASP.NET Core MVC</a:t>
             </a:r>
           </a:p>
         </p:txBody>
@@ -19525,7 +20891,7 @@
                 </a:solidFill>
                 <a:latin typeface="Segoe UI" panose="020B0502040204020203" pitchFamily="34" charset="0"/>
               </a:rPr>
-              <a:t>[Tecnología]</a:t>
+              <a:t>.NET MAUI</a:t>
             </a:r>
           </a:p>
         </p:txBody>
@@ -19609,7 +20975,7 @@
                 </a:solidFill>
                 <a:latin typeface="Segoe UI" panose="020B0502040204020203" pitchFamily="34" charset="0"/>
               </a:rPr>
-              <a:t>Comunicación: [mensajes SOAP en XML | HTTP con JSON] · autenticación por token en cada llamada</a:t>
+              <a:t>Comunicación: mensajes SOAP en XML · autenticación por token en cada llamada</a:t>
             </a:r>
             <a:endParaRPr lang="es-EC" sz="1400">
               <a:solidFill>
